--- a/Build Instructions/F Leg.x.pptx
+++ b/Build Instructions/F Leg.x.pptx
@@ -117,346 +117,59 @@
 </p:presentation>
 </file>
 
-<file path=ppt/revisionInfo.xml><?xml version="1.0" encoding="utf-8"?>
-<p1510:revInfo xmlns:a="http://schemas.openxmlformats.org/drawingml/2006/main" xmlns:r="http://schemas.openxmlformats.org/officeDocument/2006/relationships" xmlns:p1510="http://schemas.microsoft.com/office/powerpoint/2015/10/main">
-  <p1510:revLst>
-    <p1510:client id="{4C28611A-38CC-4A9F-9E23-F71604565C0B}" v="13" dt="2025-10-16T16:23:30.514"/>
-  </p1510:revLst>
-</p1510:revInfo>
-</file>
-
 <file path=ppt/changesInfos/changesInfo1.xml><?xml version="1.0" encoding="utf-8"?>
 <pc:chgInfo xmlns:a="http://schemas.openxmlformats.org/drawingml/2006/main" xmlns:r="http://schemas.openxmlformats.org/officeDocument/2006/relationships" xmlns:ac="http://schemas.microsoft.com/office/drawing/2013/main/command" xmlns:pc="http://schemas.microsoft.com/office/powerpoint/2013/main/command">
   <pc:docChgLst>
     <pc:chgData name="Jordan Henderson" userId="1aefba67a2305a7d" providerId="LiveId" clId="{544928A6-073F-4C18-B400-8A94CC0698F1}"/>
     <pc:docChg chg="undo custSel delSld modSld">
-      <pc:chgData name="Jordan Henderson" userId="1aefba67a2305a7d" providerId="LiveId" clId="{544928A6-073F-4C18-B400-8A94CC0698F1}" dt="2025-10-16T16:23:30.514" v="616"/>
+      <pc:chgData name="Jordan Henderson" userId="1aefba67a2305a7d" providerId="LiveId" clId="{544928A6-073F-4C18-B400-8A94CC0698F1}" dt="2026-10-19T16:31:40.130" v="651" actId="20577"/>
       <pc:docMkLst>
         <pc:docMk/>
       </pc:docMkLst>
-      <pc:sldChg chg="addSp delSp modSp mod">
-        <pc:chgData name="Jordan Henderson" userId="1aefba67a2305a7d" providerId="LiveId" clId="{544928A6-073F-4C18-B400-8A94CC0698F1}" dt="2025-10-16T16:23:10.103" v="606"/>
-        <pc:sldMkLst>
-          <pc:docMk/>
-          <pc:sldMk cId="2899849503" sldId="256"/>
-        </pc:sldMkLst>
-        <pc:spChg chg="mod">
-          <ac:chgData name="Jordan Henderson" userId="1aefba67a2305a7d" providerId="LiveId" clId="{544928A6-073F-4C18-B400-8A94CC0698F1}" dt="2025-10-16T16:21:53.400" v="473" actId="1076"/>
-          <ac:spMkLst>
-            <pc:docMk/>
-            <pc:sldMk cId="2899849503" sldId="256"/>
-            <ac:spMk id="2" creationId="{691A1A28-2FB3-942A-5986-4A75FAB64C36}"/>
-          </ac:spMkLst>
-        </pc:spChg>
-        <pc:spChg chg="mod">
-          <ac:chgData name="Jordan Henderson" userId="1aefba67a2305a7d" providerId="LiveId" clId="{544928A6-073F-4C18-B400-8A94CC0698F1}" dt="2025-10-16T16:21:58.659" v="475" actId="20577"/>
-          <ac:spMkLst>
-            <pc:docMk/>
-            <pc:sldMk cId="2899849503" sldId="256"/>
-            <ac:spMk id="3" creationId="{0F1AF516-8A3A-D92F-96AD-D20E35EA0C12}"/>
-          </ac:spMkLst>
-        </pc:spChg>
-        <pc:spChg chg="add mod">
-          <ac:chgData name="Jordan Henderson" userId="1aefba67a2305a7d" providerId="LiveId" clId="{544928A6-073F-4C18-B400-8A94CC0698F1}" dt="2025-10-16T16:23:10.103" v="606"/>
-          <ac:spMkLst>
-            <pc:docMk/>
-            <pc:sldMk cId="2899849503" sldId="256"/>
-            <ac:spMk id="4" creationId="{B782D93B-E26E-80FD-4F4B-4DDE80FC8813}"/>
-          </ac:spMkLst>
-        </pc:spChg>
-        <pc:picChg chg="add mod">
-          <ac:chgData name="Jordan Henderson" userId="1aefba67a2305a7d" providerId="LiveId" clId="{544928A6-073F-4C18-B400-8A94CC0698F1}" dt="2025-10-14T21:09:27.634" v="39" actId="1076"/>
-          <ac:picMkLst>
-            <pc:docMk/>
-            <pc:sldMk cId="2899849503" sldId="256"/>
-            <ac:picMk id="10" creationId="{306A9982-838C-6014-8C26-DF3098E28D4B}"/>
-          </ac:picMkLst>
-        </pc:picChg>
-      </pc:sldChg>
-      <pc:sldChg chg="delSp del mod">
-        <pc:chgData name="Jordan Henderson" userId="1aefba67a2305a7d" providerId="LiveId" clId="{544928A6-073F-4C18-B400-8A94CC0698F1}" dt="2025-10-14T21:15:10.200" v="65" actId="47"/>
-        <pc:sldMkLst>
-          <pc:docMk/>
-          <pc:sldMk cId="2706032840" sldId="257"/>
-        </pc:sldMkLst>
-      </pc:sldChg>
-      <pc:sldChg chg="delSp del mod">
-        <pc:chgData name="Jordan Henderson" userId="1aefba67a2305a7d" providerId="LiveId" clId="{544928A6-073F-4C18-B400-8A94CC0698F1}" dt="2025-10-14T21:15:10.200" v="65" actId="47"/>
-        <pc:sldMkLst>
-          <pc:docMk/>
-          <pc:sldMk cId="3926139776" sldId="258"/>
-        </pc:sldMkLst>
-      </pc:sldChg>
-      <pc:sldChg chg="delSp del mod">
-        <pc:chgData name="Jordan Henderson" userId="1aefba67a2305a7d" providerId="LiveId" clId="{544928A6-073F-4C18-B400-8A94CC0698F1}" dt="2025-10-14T21:15:10.200" v="65" actId="47"/>
-        <pc:sldMkLst>
-          <pc:docMk/>
-          <pc:sldMk cId="873946216" sldId="259"/>
-        </pc:sldMkLst>
-      </pc:sldChg>
-      <pc:sldChg chg="delSp del mod">
-        <pc:chgData name="Jordan Henderson" userId="1aefba67a2305a7d" providerId="LiveId" clId="{544928A6-073F-4C18-B400-8A94CC0698F1}" dt="2025-10-14T21:15:10.200" v="65" actId="47"/>
-        <pc:sldMkLst>
-          <pc:docMk/>
-          <pc:sldMk cId="2373839043" sldId="260"/>
-        </pc:sldMkLst>
-      </pc:sldChg>
-      <pc:sldChg chg="delSp del mod">
-        <pc:chgData name="Jordan Henderson" userId="1aefba67a2305a7d" providerId="LiveId" clId="{544928A6-073F-4C18-B400-8A94CC0698F1}" dt="2025-10-14T21:15:10.200" v="65" actId="47"/>
-        <pc:sldMkLst>
-          <pc:docMk/>
-          <pc:sldMk cId="4138172557" sldId="261"/>
-        </pc:sldMkLst>
-      </pc:sldChg>
-      <pc:sldChg chg="delSp del mod">
-        <pc:chgData name="Jordan Henderson" userId="1aefba67a2305a7d" providerId="LiveId" clId="{544928A6-073F-4C18-B400-8A94CC0698F1}" dt="2025-10-14T21:15:10.200" v="65" actId="47"/>
-        <pc:sldMkLst>
-          <pc:docMk/>
-          <pc:sldMk cId="155295672" sldId="262"/>
-        </pc:sldMkLst>
-      </pc:sldChg>
-      <pc:sldChg chg="addSp delSp modSp mod">
-        <pc:chgData name="Jordan Henderson" userId="1aefba67a2305a7d" providerId="LiveId" clId="{544928A6-073F-4C18-B400-8A94CC0698F1}" dt="2025-10-16T16:23:30.514" v="616"/>
-        <pc:sldMkLst>
-          <pc:docMk/>
-          <pc:sldMk cId="526142843" sldId="263"/>
-        </pc:sldMkLst>
-        <pc:spChg chg="add mod">
-          <ac:chgData name="Jordan Henderson" userId="1aefba67a2305a7d" providerId="LiveId" clId="{544928A6-073F-4C18-B400-8A94CC0698F1}" dt="2025-10-16T16:23:30.514" v="616"/>
-          <ac:spMkLst>
-            <pc:docMk/>
-            <pc:sldMk cId="526142843" sldId="263"/>
-            <ac:spMk id="2" creationId="{593DFD9C-932D-4FAC-314A-50C121225FDE}"/>
-          </ac:spMkLst>
-        </pc:spChg>
-        <pc:spChg chg="mod">
-          <ac:chgData name="Jordan Henderson" userId="1aefba67a2305a7d" providerId="LiveId" clId="{544928A6-073F-4C18-B400-8A94CC0698F1}" dt="2025-10-16T16:21:40.179" v="472" actId="20577"/>
-          <ac:spMkLst>
-            <pc:docMk/>
-            <pc:sldMk cId="526142843" sldId="263"/>
-            <ac:spMk id="4" creationId="{BC37C58B-4537-AFDB-A5E7-BDCB7365A465}"/>
-          </ac:spMkLst>
-        </pc:spChg>
-        <pc:picChg chg="add mod">
-          <ac:chgData name="Jordan Henderson" userId="1aefba67a2305a7d" providerId="LiveId" clId="{544928A6-073F-4C18-B400-8A94CC0698F1}" dt="2025-10-14T21:10:18.518" v="52" actId="1076"/>
-          <ac:picMkLst>
-            <pc:docMk/>
-            <pc:sldMk cId="526142843" sldId="263"/>
-            <ac:picMk id="9" creationId="{37403416-353E-EAAD-4A37-C52D6CD2FC9B}"/>
-          </ac:picMkLst>
-        </pc:picChg>
-      </pc:sldChg>
-      <pc:sldChg chg="addSp delSp modSp mod">
-        <pc:chgData name="Jordan Henderson" userId="1aefba67a2305a7d" providerId="LiveId" clId="{544928A6-073F-4C18-B400-8A94CC0698F1}" dt="2025-10-16T16:23:28.970" v="615"/>
-        <pc:sldMkLst>
-          <pc:docMk/>
-          <pc:sldMk cId="1015285371" sldId="264"/>
-        </pc:sldMkLst>
-        <pc:spChg chg="mod">
-          <ac:chgData name="Jordan Henderson" userId="1aefba67a2305a7d" providerId="LiveId" clId="{544928A6-073F-4C18-B400-8A94CC0698F1}" dt="2025-10-16T16:20:12.161" v="444" actId="20577"/>
-          <ac:spMkLst>
-            <pc:docMk/>
-            <pc:sldMk cId="1015285371" sldId="264"/>
-            <ac:spMk id="4" creationId="{E34DE991-B7F5-F797-85CE-000A70403FB4}"/>
-          </ac:spMkLst>
-        </pc:spChg>
-        <pc:spChg chg="add del">
-          <ac:chgData name="Jordan Henderson" userId="1aefba67a2305a7d" providerId="LiveId" clId="{544928A6-073F-4C18-B400-8A94CC0698F1}" dt="2025-10-16T16:19:56.960" v="432" actId="478"/>
-          <ac:spMkLst>
-            <pc:docMk/>
-            <pc:sldMk cId="1015285371" sldId="264"/>
-            <ac:spMk id="19" creationId="{FF741F36-750A-FC7E-E923-E156D175DBA1}"/>
-          </ac:spMkLst>
-        </pc:spChg>
-        <pc:spChg chg="add mod">
-          <ac:chgData name="Jordan Henderson" userId="1aefba67a2305a7d" providerId="LiveId" clId="{544928A6-073F-4C18-B400-8A94CC0698F1}" dt="2025-10-16T16:23:28.970" v="615"/>
-          <ac:spMkLst>
-            <pc:docMk/>
-            <pc:sldMk cId="1015285371" sldId="264"/>
-            <ac:spMk id="28" creationId="{E4F21A34-B49D-3559-1893-7E5058A655A3}"/>
-          </ac:spMkLst>
-        </pc:spChg>
-        <pc:picChg chg="add mod">
-          <ac:chgData name="Jordan Henderson" userId="1aefba67a2305a7d" providerId="LiveId" clId="{544928A6-073F-4C18-B400-8A94CC0698F1}" dt="2025-10-14T21:10:45.889" v="57" actId="1076"/>
-          <ac:picMkLst>
-            <pc:docMk/>
-            <pc:sldMk cId="1015285371" sldId="264"/>
-            <ac:picMk id="7" creationId="{0601D87B-8942-E0D3-AC53-E1E397415C19}"/>
-          </ac:picMkLst>
-        </pc:picChg>
-        <pc:cxnChg chg="add mod">
-          <ac:chgData name="Jordan Henderson" userId="1aefba67a2305a7d" providerId="LiveId" clId="{544928A6-073F-4C18-B400-8A94CC0698F1}" dt="2025-10-16T16:20:06.754" v="434" actId="14100"/>
-          <ac:cxnSpMkLst>
-            <pc:docMk/>
-            <pc:sldMk cId="1015285371" sldId="264"/>
-            <ac:cxnSpMk id="3" creationId="{36F1D9AE-4CA5-D525-ABB8-E4C96F89CB38}"/>
-          </ac:cxnSpMkLst>
-        </pc:cxnChg>
-        <pc:cxnChg chg="add mod">
-          <ac:chgData name="Jordan Henderson" userId="1aefba67a2305a7d" providerId="LiveId" clId="{544928A6-073F-4C18-B400-8A94CC0698F1}" dt="2025-10-16T16:18:34.620" v="420" actId="14100"/>
-          <ac:cxnSpMkLst>
-            <pc:docMk/>
-            <pc:sldMk cId="1015285371" sldId="264"/>
-            <ac:cxnSpMk id="6" creationId="{16F42A1D-CF1B-1C5D-1C67-B7F072824F49}"/>
-          </ac:cxnSpMkLst>
-        </pc:cxnChg>
-        <pc:cxnChg chg="add mod">
-          <ac:chgData name="Jordan Henderson" userId="1aefba67a2305a7d" providerId="LiveId" clId="{544928A6-073F-4C18-B400-8A94CC0698F1}" dt="2025-10-16T16:20:16.885" v="445" actId="14100"/>
-          <ac:cxnSpMkLst>
-            <pc:docMk/>
-            <pc:sldMk cId="1015285371" sldId="264"/>
-            <ac:cxnSpMk id="11" creationId="{3AA11266-8BE1-41ED-61A6-99355663A1D4}"/>
-          </ac:cxnSpMkLst>
-        </pc:cxnChg>
-        <pc:cxnChg chg="add del">
-          <ac:chgData name="Jordan Henderson" userId="1aefba67a2305a7d" providerId="LiveId" clId="{544928A6-073F-4C18-B400-8A94CC0698F1}" dt="2025-10-16T16:18:53.588" v="424" actId="478"/>
-          <ac:cxnSpMkLst>
-            <pc:docMk/>
-            <pc:sldMk cId="1015285371" sldId="264"/>
-            <ac:cxnSpMk id="13" creationId="{9149F001-4CEB-F630-EAD4-B66A8430DD5B}"/>
-          </ac:cxnSpMkLst>
-        </pc:cxnChg>
-        <pc:cxnChg chg="add del mod">
-          <ac:chgData name="Jordan Henderson" userId="1aefba67a2305a7d" providerId="LiveId" clId="{544928A6-073F-4C18-B400-8A94CC0698F1}" dt="2025-10-16T16:19:29.609" v="429" actId="478"/>
-          <ac:cxnSpMkLst>
-            <pc:docMk/>
-            <pc:sldMk cId="1015285371" sldId="264"/>
-            <ac:cxnSpMk id="15" creationId="{9C608BDC-AC3F-7DE4-8452-7971F7D78C46}"/>
-          </ac:cxnSpMkLst>
-        </pc:cxnChg>
-        <pc:cxnChg chg="add del mod">
-          <ac:chgData name="Jordan Henderson" userId="1aefba67a2305a7d" providerId="LiveId" clId="{544928A6-073F-4C18-B400-8A94CC0698F1}" dt="2025-10-16T16:20:00.220" v="433" actId="478"/>
-          <ac:cxnSpMkLst>
-            <pc:docMk/>
-            <pc:sldMk cId="1015285371" sldId="264"/>
-            <ac:cxnSpMk id="21" creationId="{0D999DAB-DF58-3379-16C0-47EEADA930D0}"/>
-          </ac:cxnSpMkLst>
-        </pc:cxnChg>
-        <pc:cxnChg chg="add del">
-          <ac:chgData name="Jordan Henderson" userId="1aefba67a2305a7d" providerId="LiveId" clId="{544928A6-073F-4C18-B400-8A94CC0698F1}" dt="2025-10-16T16:20:33.363" v="448" actId="478"/>
-          <ac:cxnSpMkLst>
-            <pc:docMk/>
-            <pc:sldMk cId="1015285371" sldId="264"/>
-            <ac:cxnSpMk id="25" creationId="{328CAB2F-663B-577D-7083-704BCF0C9D44}"/>
-          </ac:cxnSpMkLst>
-        </pc:cxnChg>
-        <pc:cxnChg chg="add">
-          <ac:chgData name="Jordan Henderson" userId="1aefba67a2305a7d" providerId="LiveId" clId="{544928A6-073F-4C18-B400-8A94CC0698F1}" dt="2025-10-16T16:20:30.996" v="447" actId="11529"/>
-          <ac:cxnSpMkLst>
-            <pc:docMk/>
-            <pc:sldMk cId="1015285371" sldId="264"/>
-            <ac:cxnSpMk id="27" creationId="{3D1BB4F5-FC4B-D54A-5CD2-AB3BF79C4753}"/>
-          </ac:cxnSpMkLst>
-        </pc:cxnChg>
-      </pc:sldChg>
-      <pc:sldChg chg="addSp delSp modSp mod">
-        <pc:chgData name="Jordan Henderson" userId="1aefba67a2305a7d" providerId="LiveId" clId="{544928A6-073F-4C18-B400-8A94CC0698F1}" dt="2025-10-16T16:23:26.915" v="614"/>
+      <pc:sldChg chg="modSp mod">
+        <pc:chgData name="Jordan Henderson" userId="1aefba67a2305a7d" providerId="LiveId" clId="{544928A6-073F-4C18-B400-8A94CC0698F1}" dt="2026-10-19T16:31:40.130" v="651" actId="20577"/>
         <pc:sldMkLst>
           <pc:docMk/>
           <pc:sldMk cId="3240098238" sldId="265"/>
         </pc:sldMkLst>
-        <pc:spChg chg="add mod">
-          <ac:chgData name="Jordan Henderson" userId="1aefba67a2305a7d" providerId="LiveId" clId="{544928A6-073F-4C18-B400-8A94CC0698F1}" dt="2025-10-16T16:15:31.992" v="354" actId="27636"/>
+        <pc:spChg chg="mod">
+          <ac:chgData name="Jordan Henderson" userId="1aefba67a2305a7d" providerId="LiveId" clId="{544928A6-073F-4C18-B400-8A94CC0698F1}" dt="2026-10-19T16:31:40.130" v="651" actId="20577"/>
           <ac:spMkLst>
             <pc:docMk/>
             <pc:sldMk cId="3240098238" sldId="265"/>
             <ac:spMk id="2" creationId="{E2ED38F3-1ECA-E993-0815-D79695E58680}"/>
           </ac:spMkLst>
         </pc:spChg>
-        <pc:spChg chg="add mod">
-          <ac:chgData name="Jordan Henderson" userId="1aefba67a2305a7d" providerId="LiveId" clId="{544928A6-073F-4C18-B400-8A94CC0698F1}" dt="2025-10-16T16:23:26.915" v="614"/>
-          <ac:spMkLst>
-            <pc:docMk/>
-            <pc:sldMk cId="3240098238" sldId="265"/>
-            <ac:spMk id="3" creationId="{A9C57C0F-A295-CAF3-874E-36AFD78C7FFA}"/>
-          </ac:spMkLst>
-        </pc:spChg>
-        <pc:spChg chg="del">
-          <ac:chgData name="Jordan Henderson" userId="1aefba67a2305a7d" providerId="LiveId" clId="{544928A6-073F-4C18-B400-8A94CC0698F1}" dt="2025-10-16T14:03:58.222" v="128" actId="478"/>
-          <ac:spMkLst>
-            <pc:docMk/>
-            <pc:sldMk cId="3240098238" sldId="265"/>
-            <ac:spMk id="4" creationId="{5F8476C2-E3AE-8076-CBC2-E4138330FA1D}"/>
-          </ac:spMkLst>
-        </pc:spChg>
-        <pc:picChg chg="add mod">
-          <ac:chgData name="Jordan Henderson" userId="1aefba67a2305a7d" providerId="LiveId" clId="{544928A6-073F-4C18-B400-8A94CC0698F1}" dt="2025-10-14T21:11:29.542" v="59" actId="1076"/>
-          <ac:picMkLst>
-            <pc:docMk/>
-            <pc:sldMk cId="3240098238" sldId="265"/>
-            <ac:picMk id="6" creationId="{33A1FB51-6B93-B947-9B3E-8D056BBECCF1}"/>
-          </ac:picMkLst>
-        </pc:picChg>
       </pc:sldChg>
-      <pc:sldChg chg="addSp delSp modSp mod">
-        <pc:chgData name="Jordan Henderson" userId="1aefba67a2305a7d" providerId="LiveId" clId="{544928A6-073F-4C18-B400-8A94CC0698F1}" dt="2025-10-16T16:23:25.700" v="613" actId="1076"/>
+      <pc:sldChg chg="modSp mod">
+        <pc:chgData name="Jordan Henderson" userId="1aefba67a2305a7d" providerId="LiveId" clId="{544928A6-073F-4C18-B400-8A94CC0698F1}" dt="2026-10-19T16:31:29.448" v="641" actId="20577"/>
         <pc:sldMkLst>
           <pc:docMk/>
           <pc:sldMk cId="222971204" sldId="266"/>
         </pc:sldMkLst>
-        <pc:spChg chg="add mod">
-          <ac:chgData name="Jordan Henderson" userId="1aefba67a2305a7d" providerId="LiveId" clId="{544928A6-073F-4C18-B400-8A94CC0698F1}" dt="2025-10-16T16:23:25.700" v="613" actId="1076"/>
-          <ac:spMkLst>
-            <pc:docMk/>
-            <pc:sldMk cId="222971204" sldId="266"/>
-            <ac:spMk id="2" creationId="{A0A9564D-EDD4-8124-2819-B21595322F82}"/>
-          </ac:spMkLst>
-        </pc:spChg>
         <pc:spChg chg="mod">
-          <ac:chgData name="Jordan Henderson" userId="1aefba67a2305a7d" providerId="LiveId" clId="{544928A6-073F-4C18-B400-8A94CC0698F1}" dt="2025-10-16T16:15:01.434" v="350" actId="20577"/>
+          <ac:chgData name="Jordan Henderson" userId="1aefba67a2305a7d" providerId="LiveId" clId="{544928A6-073F-4C18-B400-8A94CC0698F1}" dt="2026-10-19T16:31:29.448" v="641" actId="20577"/>
           <ac:spMkLst>
             <pc:docMk/>
             <pc:sldMk cId="222971204" sldId="266"/>
             <ac:spMk id="5" creationId="{431EE6A0-89F7-2D68-D66B-6BD0ED1E669B}"/>
           </ac:spMkLst>
         </pc:spChg>
-        <pc:picChg chg="add mod">
-          <ac:chgData name="Jordan Henderson" userId="1aefba67a2305a7d" providerId="LiveId" clId="{544928A6-073F-4C18-B400-8A94CC0698F1}" dt="2025-10-14T21:14:28.363" v="62" actId="1076"/>
-          <ac:picMkLst>
-            <pc:docMk/>
-            <pc:sldMk cId="222971204" sldId="266"/>
-            <ac:picMk id="7" creationId="{D5DE9959-2439-E45A-1B8E-139993B0F35E}"/>
-          </ac:picMkLst>
-        </pc:picChg>
       </pc:sldChg>
       <pc:sldChg chg="addSp delSp modSp mod">
-        <pc:chgData name="Jordan Henderson" userId="1aefba67a2305a7d" providerId="LiveId" clId="{544928A6-073F-4C18-B400-8A94CC0698F1}" dt="2025-10-16T16:23:21.241" v="611"/>
+        <pc:chgData name="Jordan Henderson" userId="1aefba67a2305a7d" providerId="LiveId" clId="{544928A6-073F-4C18-B400-8A94CC0698F1}" dt="2026-10-19T16:31:19.216" v="631" actId="27636"/>
         <pc:sldMkLst>
           <pc:docMk/>
           <pc:sldMk cId="539696802" sldId="267"/>
         </pc:sldMkLst>
-        <pc:spChg chg="add del mod">
-          <ac:chgData name="Jordan Henderson" userId="1aefba67a2305a7d" providerId="LiveId" clId="{544928A6-073F-4C18-B400-8A94CC0698F1}" dt="2025-10-16T16:23:16.767" v="610" actId="22"/>
-          <ac:spMkLst>
-            <pc:docMk/>
-            <pc:sldMk cId="539696802" sldId="267"/>
-            <ac:spMk id="3" creationId="{ADF0AEB1-9E96-5009-E493-D5AA3B45E446}"/>
-          </ac:spMkLst>
-        </pc:spChg>
         <pc:spChg chg="mod">
-          <ac:chgData name="Jordan Henderson" userId="1aefba67a2305a7d" providerId="LiveId" clId="{544928A6-073F-4C18-B400-8A94CC0698F1}" dt="2025-10-16T16:13:11.342" v="285" actId="20577"/>
+          <ac:chgData name="Jordan Henderson" userId="1aefba67a2305a7d" providerId="LiveId" clId="{544928A6-073F-4C18-B400-8A94CC0698F1}" dt="2026-10-19T16:31:19.216" v="631" actId="27636"/>
           <ac:spMkLst>
             <pc:docMk/>
             <pc:sldMk cId="539696802" sldId="267"/>
             <ac:spMk id="4" creationId="{FDC7C5C2-6C56-457D-752C-FA9E5E148B1A}"/>
           </ac:spMkLst>
         </pc:spChg>
-        <pc:spChg chg="add mod">
-          <ac:chgData name="Jordan Henderson" userId="1aefba67a2305a7d" providerId="LiveId" clId="{544928A6-073F-4C18-B400-8A94CC0698F1}" dt="2025-10-16T16:23:21.241" v="611"/>
-          <ac:spMkLst>
-            <pc:docMk/>
-            <pc:sldMk cId="539696802" sldId="267"/>
-            <ac:spMk id="5" creationId="{285518BD-EF87-1E45-59FC-BC3325E82EBC}"/>
-          </ac:spMkLst>
-        </pc:spChg>
-        <pc:picChg chg="add mod">
-          <ac:chgData name="Jordan Henderson" userId="1aefba67a2305a7d" providerId="LiveId" clId="{544928A6-073F-4C18-B400-8A94CC0698F1}" dt="2025-10-14T21:15:04.368" v="64" actId="1076"/>
-          <ac:picMkLst>
-            <pc:docMk/>
-            <pc:sldMk cId="539696802" sldId="267"/>
-            <ac:picMk id="6" creationId="{EB02CB63-EA51-2739-D07A-4FA64B8A7B6E}"/>
-          </ac:picMkLst>
-        </pc:picChg>
       </pc:sldChg>
     </pc:docChg>
   </pc:docChgLst>
@@ -610,7 +323,7 @@
           <a:p>
             <a:fld id="{683FA9A8-6EAC-48D3-B691-FF2EF854CE7B}" type="datetimeFigureOut">
               <a:rPr lang="en-US" smtClean="0"/>
-              <a:t>10/16/2025</a:t>
+              <a:t>10/19/2026</a:t>
             </a:fld>
             <a:endParaRPr lang="en-US"/>
           </a:p>
@@ -808,7 +521,7 @@
           <a:p>
             <a:fld id="{683FA9A8-6EAC-48D3-B691-FF2EF854CE7B}" type="datetimeFigureOut">
               <a:rPr lang="en-US" smtClean="0"/>
-              <a:t>10/16/2025</a:t>
+              <a:t>10/19/2026</a:t>
             </a:fld>
             <a:endParaRPr lang="en-US"/>
           </a:p>
@@ -1016,7 +729,7 @@
           <a:p>
             <a:fld id="{683FA9A8-6EAC-48D3-B691-FF2EF854CE7B}" type="datetimeFigureOut">
               <a:rPr lang="en-US" smtClean="0"/>
-              <a:t>10/16/2025</a:t>
+              <a:t>10/19/2026</a:t>
             </a:fld>
             <a:endParaRPr lang="en-US"/>
           </a:p>
@@ -1214,7 +927,7 @@
           <a:p>
             <a:fld id="{683FA9A8-6EAC-48D3-B691-FF2EF854CE7B}" type="datetimeFigureOut">
               <a:rPr lang="en-US" smtClean="0"/>
-              <a:t>10/16/2025</a:t>
+              <a:t>10/19/2026</a:t>
             </a:fld>
             <a:endParaRPr lang="en-US"/>
           </a:p>
@@ -1489,7 +1202,7 @@
           <a:p>
             <a:fld id="{683FA9A8-6EAC-48D3-B691-FF2EF854CE7B}" type="datetimeFigureOut">
               <a:rPr lang="en-US" smtClean="0"/>
-              <a:t>10/16/2025</a:t>
+              <a:t>10/19/2026</a:t>
             </a:fld>
             <a:endParaRPr lang="en-US"/>
           </a:p>
@@ -1754,7 +1467,7 @@
           <a:p>
             <a:fld id="{683FA9A8-6EAC-48D3-B691-FF2EF854CE7B}" type="datetimeFigureOut">
               <a:rPr lang="en-US" smtClean="0"/>
-              <a:t>10/16/2025</a:t>
+              <a:t>10/19/2026</a:t>
             </a:fld>
             <a:endParaRPr lang="en-US"/>
           </a:p>
@@ -2166,7 +1879,7 @@
           <a:p>
             <a:fld id="{683FA9A8-6EAC-48D3-B691-FF2EF854CE7B}" type="datetimeFigureOut">
               <a:rPr lang="en-US" smtClean="0"/>
-              <a:t>10/16/2025</a:t>
+              <a:t>10/19/2026</a:t>
             </a:fld>
             <a:endParaRPr lang="en-US"/>
           </a:p>
@@ -2307,7 +2020,7 @@
           <a:p>
             <a:fld id="{683FA9A8-6EAC-48D3-B691-FF2EF854CE7B}" type="datetimeFigureOut">
               <a:rPr lang="en-US" smtClean="0"/>
-              <a:t>10/16/2025</a:t>
+              <a:t>10/19/2026</a:t>
             </a:fld>
             <a:endParaRPr lang="en-US"/>
           </a:p>
@@ -2420,7 +2133,7 @@
           <a:p>
             <a:fld id="{683FA9A8-6EAC-48D3-B691-FF2EF854CE7B}" type="datetimeFigureOut">
               <a:rPr lang="en-US" smtClean="0"/>
-              <a:t>10/16/2025</a:t>
+              <a:t>10/19/2026</a:t>
             </a:fld>
             <a:endParaRPr lang="en-US"/>
           </a:p>
@@ -2731,7 +2444,7 @@
           <a:p>
             <a:fld id="{683FA9A8-6EAC-48D3-B691-FF2EF854CE7B}" type="datetimeFigureOut">
               <a:rPr lang="en-US" smtClean="0"/>
-              <a:t>10/16/2025</a:t>
+              <a:t>10/19/2026</a:t>
             </a:fld>
             <a:endParaRPr lang="en-US"/>
           </a:p>
@@ -3019,7 +2732,7 @@
           <a:p>
             <a:fld id="{683FA9A8-6EAC-48D3-B691-FF2EF854CE7B}" type="datetimeFigureOut">
               <a:rPr lang="en-US" smtClean="0"/>
-              <a:t>10/16/2025</a:t>
+              <a:t>10/19/2026</a:t>
             </a:fld>
             <a:endParaRPr lang="en-US"/>
           </a:p>
@@ -3260,7 +2973,7 @@
           <a:p>
             <a:fld id="{683FA9A8-6EAC-48D3-B691-FF2EF854CE7B}" type="datetimeFigureOut">
               <a:rPr lang="en-US" smtClean="0"/>
-              <a:t>10/16/2025</a:t>
+              <a:t>10/19/2026</a:t>
             </a:fld>
             <a:endParaRPr lang="en-US"/>
           </a:p>
@@ -4095,7 +3808,7 @@
               <a:rPr lang="en-US" dirty="0">
                 <a:sym typeface="Wingdings" panose="05000000000000000000" pitchFamily="2" charset="2"/>
               </a:rPr>
-              <a:t>10’5”</a:t>
+              <a:t>125”</a:t>
             </a:r>
           </a:p>
           <a:p>
@@ -4128,7 +3841,7 @@
               <a:rPr lang="en-US" dirty="0">
                 <a:sym typeface="Wingdings" panose="05000000000000000000" pitchFamily="2" charset="2"/>
               </a:rPr>
-              <a:t>3’5”</a:t>
+              <a:t>41”</a:t>
             </a:r>
           </a:p>
           <a:p>
@@ -4470,7 +4183,7 @@
               <a:rPr lang="en-US" dirty="0">
                 <a:sym typeface="Wingdings" panose="05000000000000000000" pitchFamily="2" charset="2"/>
               </a:rPr>
-              <a:t>3’9”</a:t>
+              <a:t>45”</a:t>
             </a:r>
           </a:p>
           <a:p>
@@ -4516,7 +4229,7 @@
               <a:rPr lang="en-US" dirty="0">
                 <a:sym typeface="Wingdings" panose="05000000000000000000" pitchFamily="2" charset="2"/>
               </a:rPr>
-              <a:t>3’9”</a:t>
+              <a:t>45”</a:t>
             </a:r>
           </a:p>
           <a:p>
@@ -4888,7 +4601,7 @@
               <a:rPr lang="en-US" dirty="0">
                 <a:sym typeface="Wingdings" panose="05000000000000000000" pitchFamily="2" charset="2"/>
               </a:rPr>
-              <a:t>10’5”</a:t>
+              <a:t>125”</a:t>
             </a:r>
           </a:p>
           <a:p>
@@ -4921,7 +4634,7 @@
               <a:rPr lang="en-US" dirty="0">
                 <a:sym typeface="Wingdings" panose="05000000000000000000" pitchFamily="2" charset="2"/>
               </a:rPr>
-              <a:t>3’5”</a:t>
+              <a:t>41”</a:t>
             </a:r>
           </a:p>
           <a:p>
